--- a/plugins-dist/ppt-engine/raven_ppt/assets/templates/amber_wave_quarterly_summary.pptx
+++ b/plugins-dist/ppt-engine/raven_ppt/assets/templates/amber_wave_quarterly_summary.pptx
@@ -5335,10 +5335,6 @@
           </a:lstStyle>
           <a:p>
             <a:pPr lvl="0"/>
-            <a:r>
-              <a:rPr lang="zh-CN" altLang="en-US" dirty="0"/>
-              <a:t>www.islide.cc</a:t>
-            </a:r>
             <a:endParaRPr lang="en-US" dirty="0"/>
           </a:p>
         </p:txBody>
@@ -10302,10 +10298,6 @@
           <a:bodyPr/>
           <a:lstStyle/>
           <a:p>
-            <a:r>
-              <a:rPr lang="af-ZA" altLang="zh-CN"/>
-              <a:t>iSlide</a:t>
-            </a:r>
             <a:endParaRPr lang="zh-CN" altLang="en-US"/>
           </a:p>
         </p:txBody>
@@ -13976,10 +13968,6 @@
           </a:lstStyle>
           <a:p>
             <a:pPr lvl="0"/>
-            <a:r>
-              <a:rPr lang="zh-CN" altLang="en-US" dirty="0"/>
-              <a:t>www.islide.cc</a:t>
-            </a:r>
             <a:endParaRPr lang="en-US" dirty="0"/>
           </a:p>
         </p:txBody>
@@ -15897,7 +15885,7 @@
           <a:p>
             <a:r>
               <a:rPr lang="zh-CN" altLang="en-US"/>
-              <a:t>www.islide.cc</a:t>
+              <a:t>20XX.XX.XX</a:t>
             </a:r>
             <a:endParaRPr lang="en-US" dirty="0"/>
           </a:p>
@@ -28848,7 +28836,7 @@
         </p:grpSpPr>
         <p:sp>
           <p:nvSpPr>
-            <p:cNvPr id="37" name="islide-1">
+            <p:cNvPr id="37" name="-1">
               <a:extLst>
                 <a:ext uri="{FF2B5EF4-FFF2-40B4-BE49-F238E27FC236}">
                   <a16:creationId xmlns:a16="http://schemas.microsoft.com/office/drawing/2014/main" id="{740FE8D4-609B-4738-4E52-029B5E7252E2}"/>
@@ -29475,7 +29463,7 @@
           </p:grpSpPr>
           <p:sp>
             <p:nvSpPr>
-              <p:cNvPr id="48" name="islide-2">
+              <p:cNvPr id="48" name="-2">
                 <a:extLst>
                   <a:ext uri="{FF2B5EF4-FFF2-40B4-BE49-F238E27FC236}">
                     <a16:creationId xmlns:a16="http://schemas.microsoft.com/office/drawing/2014/main" id="{D44335BD-02C3-2B02-F8A1-68B2A48FE8CB}"/>
@@ -29609,7 +29597,7 @@
           </p:sp>
           <p:sp>
             <p:nvSpPr>
-              <p:cNvPr id="49" name="islide-3">
+              <p:cNvPr id="49" name="-3">
                 <a:extLst>
                   <a:ext uri="{FF2B5EF4-FFF2-40B4-BE49-F238E27FC236}">
                     <a16:creationId xmlns:a16="http://schemas.microsoft.com/office/drawing/2014/main" id="{0878AC66-05D3-FD48-82CD-EA83116BBA9A}"/>
@@ -29782,7 +29770,7 @@
           </p:sp>
           <p:sp>
             <p:nvSpPr>
-              <p:cNvPr id="50" name="islide-4">
+              <p:cNvPr id="50" name="-4">
                 <a:extLst>
                   <a:ext uri="{FF2B5EF4-FFF2-40B4-BE49-F238E27FC236}">
                     <a16:creationId xmlns:a16="http://schemas.microsoft.com/office/drawing/2014/main" id="{BEF4F5B3-FFF6-FB34-9E8C-6657D7BDFD6F}"/>
@@ -29990,7 +29978,7 @@
           </p:grpSpPr>
           <p:sp>
             <p:nvSpPr>
-              <p:cNvPr id="45" name="islide-6">
+              <p:cNvPr id="45" name="-6">
                 <a:extLst>
                   <a:ext uri="{FF2B5EF4-FFF2-40B4-BE49-F238E27FC236}">
                     <a16:creationId xmlns:a16="http://schemas.microsoft.com/office/drawing/2014/main" id="{66713D92-3A81-A659-00F6-41BB38FC20CC}"/>
@@ -30177,7 +30165,7 @@
           </p:sp>
           <p:sp>
             <p:nvSpPr>
-              <p:cNvPr id="46" name="islide-8">
+              <p:cNvPr id="46" name="-8">
                 <a:extLst>
                   <a:ext uri="{FF2B5EF4-FFF2-40B4-BE49-F238E27FC236}">
                     <a16:creationId xmlns:a16="http://schemas.microsoft.com/office/drawing/2014/main" id="{4F2E5312-8D39-BE77-91AA-907EFCC16EC8}"/>
@@ -30311,7 +30299,7 @@
           </p:sp>
           <p:sp>
             <p:nvSpPr>
-              <p:cNvPr id="47" name="islide-9">
+              <p:cNvPr id="47" name="-9">
                 <a:extLst>
                   <a:ext uri="{FF2B5EF4-FFF2-40B4-BE49-F238E27FC236}">
                     <a16:creationId xmlns:a16="http://schemas.microsoft.com/office/drawing/2014/main" id="{DDFFAFA8-C204-3D91-C40D-BBAD47E37BCC}"/>
@@ -30505,7 +30493,7 @@
           </p:grpSpPr>
           <p:sp>
             <p:nvSpPr>
-              <p:cNvPr id="42" name="islide-10">
+              <p:cNvPr id="42" name="-10">
                 <a:extLst>
                   <a:ext uri="{FF2B5EF4-FFF2-40B4-BE49-F238E27FC236}">
                     <a16:creationId xmlns:a16="http://schemas.microsoft.com/office/drawing/2014/main" id="{84B6D0CE-AF8F-B5D6-383D-E7302D93FB05}"/>
@@ -30692,7 +30680,7 @@
           </p:sp>
           <p:sp>
             <p:nvSpPr>
-              <p:cNvPr id="43" name="islide-12">
+              <p:cNvPr id="43" name="-12">
                 <a:extLst>
                   <a:ext uri="{FF2B5EF4-FFF2-40B4-BE49-F238E27FC236}">
                     <a16:creationId xmlns:a16="http://schemas.microsoft.com/office/drawing/2014/main" id="{E4C8DB8A-221C-6F88-ACB8-DE92958C0373}"/>
@@ -30826,7 +30814,7 @@
           </p:sp>
           <p:sp>
             <p:nvSpPr>
-              <p:cNvPr id="44" name="islide-13">
+              <p:cNvPr id="44" name="-13">
                 <a:extLst>
                   <a:ext uri="{FF2B5EF4-FFF2-40B4-BE49-F238E27FC236}">
                     <a16:creationId xmlns:a16="http://schemas.microsoft.com/office/drawing/2014/main" id="{6197E67A-367A-341A-279D-2AB737BE6457}"/>
@@ -31000,7 +30988,7 @@
         </p:grpSp>
         <p:sp>
           <p:nvSpPr>
-            <p:cNvPr id="41" name="islide-14">
+            <p:cNvPr id="41" name="-14">
               <a:extLst>
                 <a:ext uri="{FF2B5EF4-FFF2-40B4-BE49-F238E27FC236}">
                   <a16:creationId xmlns:a16="http://schemas.microsoft.com/office/drawing/2014/main" id="{FFC7F5C4-DAE6-02AD-F7EA-8733D3EED1A5}"/>
@@ -31212,7 +31200,7 @@
         </p:grpSpPr>
         <p:sp>
           <p:nvSpPr>
-            <p:cNvPr id="35" name="islide-1">
+            <p:cNvPr id="35" name="-1">
               <a:extLst>
                 <a:ext uri="{FF2B5EF4-FFF2-40B4-BE49-F238E27FC236}">
                   <a16:creationId xmlns:a16="http://schemas.microsoft.com/office/drawing/2014/main" id="{BB504238-B0EA-753F-06C8-A5858F86007C}"/>
@@ -31293,7 +31281,7 @@
         </p:sp>
         <p:sp>
           <p:nvSpPr>
-            <p:cNvPr id="36" name="islide-3">
+            <p:cNvPr id="36" name="-3">
               <a:extLst>
                 <a:ext uri="{FF2B5EF4-FFF2-40B4-BE49-F238E27FC236}">
                   <a16:creationId xmlns:a16="http://schemas.microsoft.com/office/drawing/2014/main" id="{45DA5C0E-A61F-B234-B5B8-D9302B43EA4D}"/>
@@ -31376,7 +31364,7 @@
         </p:sp>
         <p:sp>
           <p:nvSpPr>
-            <p:cNvPr id="37" name="islide-5">
+            <p:cNvPr id="37" name="-5">
               <a:extLst>
                 <a:ext uri="{FF2B5EF4-FFF2-40B4-BE49-F238E27FC236}">
                   <a16:creationId xmlns:a16="http://schemas.microsoft.com/office/drawing/2014/main" id="{B76CE7E4-27BE-857E-B4E6-3B3366B8AB11}"/>
@@ -31459,7 +31447,7 @@
         </p:sp>
         <p:sp>
           <p:nvSpPr>
-            <p:cNvPr id="38" name="islide-17">
+            <p:cNvPr id="38" name="-17">
               <a:extLst>
                 <a:ext uri="{FF2B5EF4-FFF2-40B4-BE49-F238E27FC236}">
                   <a16:creationId xmlns:a16="http://schemas.microsoft.com/office/drawing/2014/main" id="{86893273-C4A0-5F22-2413-04A7BD8F883D}"/>
@@ -33227,7 +33215,7 @@
           <a:p>
             <a:r>
               <a:rPr lang="zh-CN" altLang="en-US" dirty="0"/>
-              <a:t>www.islide.cc</a:t>
+              <a:t>20XX.XX.XX</a:t>
             </a:r>
             <a:endParaRPr lang="en-US" dirty="0"/>
           </a:p>
@@ -37170,7 +37158,7 @@
           </p:grpSpPr>
           <p:graphicFrame>
             <p:nvGraphicFramePr>
-              <p:cNvPr id="40" name="islide-3-2">
+              <p:cNvPr id="40" name="-3-2">
                 <a:extLst>
                   <a:ext uri="{FF2B5EF4-FFF2-40B4-BE49-F238E27FC236}">
                     <a16:creationId xmlns:a16="http://schemas.microsoft.com/office/drawing/2014/main" id="{333C1059-A488-1C83-527E-5213AB0267A9}"/>
@@ -37317,7 +37305,7 @@
           </p:grpSpPr>
           <p:sp>
             <p:nvSpPr>
-              <p:cNvPr id="9" name="islide-3-11">
+              <p:cNvPr id="9" name="-3-11">
                 <a:extLst>
                   <a:ext uri="{FF2B5EF4-FFF2-40B4-BE49-F238E27FC236}">
                     <a16:creationId xmlns:a16="http://schemas.microsoft.com/office/drawing/2014/main" id="{3BF26FBA-0EDF-E4C5-E140-A56DF28864A6}"/>
@@ -37398,7 +37386,7 @@
           </p:sp>
           <p:sp>
             <p:nvSpPr>
-              <p:cNvPr id="10" name="islide-3-3">
+              <p:cNvPr id="10" name="-3-3">
                 <a:extLst>
                   <a:ext uri="{FF2B5EF4-FFF2-40B4-BE49-F238E27FC236}">
                     <a16:creationId xmlns:a16="http://schemas.microsoft.com/office/drawing/2014/main" id="{A7109490-8B88-3A2B-A051-8B497E5F08F7}"/>
@@ -37489,7 +37477,7 @@
           </p:sp>
           <p:sp>
             <p:nvSpPr>
-              <p:cNvPr id="39" name="islide-3-12">
+              <p:cNvPr id="39" name="-3-12">
                 <a:extLst>
                   <a:ext uri="{FF2B5EF4-FFF2-40B4-BE49-F238E27FC236}">
                     <a16:creationId xmlns:a16="http://schemas.microsoft.com/office/drawing/2014/main" id="{072A2C6B-BC25-91C9-2985-7F5EE80C36AF}"/>
@@ -44046,7 +44034,7 @@
           </p:grpSpPr>
           <p:sp>
             <p:nvSpPr>
-              <p:cNvPr id="30" name="islide-4-1">
+              <p:cNvPr id="30" name="-4-1">
                 <a:extLst>
                   <a:ext uri="{FF2B5EF4-FFF2-40B4-BE49-F238E27FC236}">
                     <a16:creationId xmlns:a16="http://schemas.microsoft.com/office/drawing/2014/main" id="{C91BE87B-E756-0D19-8C92-5A9282D19364}"/>
@@ -44568,13 +44556,11 @@
 </file>
 
 <file path=ppt/tags/tag1.xml><?xml version="1.0" encoding="utf-8"?>
-<p:tagLst xmlns:a="http://schemas.openxmlformats.org/drawingml/2006/main" xmlns:r="http://schemas.openxmlformats.org/officeDocument/2006/relationships" xmlns:p="http://schemas.openxmlformats.org/presentationml/2006/main">
-  <p:tag name="ISLIDE.GUIDESSETTING" val="{&quot;Id&quot;:&quot;GuidesStyle_Normal&quot;,&quot;Name&quot;:&quot;GuidesStyle_Normal&quot;,&quot;Kind&quot;:0,&quot;OldGuidesSetting&quot;:{&quot;HeaderHeight&quot;:15.0,&quot;FooterHeight&quot;:9.0,&quot;SideMargin&quot;:5.5,&quot;TopMargin&quot;:0.0,&quot;BottomMargin&quot;:0.0,&quot;IntervalMargin&quot;:1.5}}"/>
-</p:tagLst>
+<p:tagLst xmlns:a="http://schemas.openxmlformats.org/drawingml/2006/main" xmlns:r="http://schemas.openxmlformats.org/officeDocument/2006/relationships" xmlns:p="http://schemas.openxmlformats.org/presentationml/2006/main"/>
 </file>
 
 <file path=ppt/theme/theme1.xml><?xml version="1.0" encoding="utf-8"?>
-<a:theme xmlns:thm15="http://schemas.microsoft.com/office/thememl/2012/main" xmlns:a="http://schemas.openxmlformats.org/drawingml/2006/main" name="Designed by iSlide">
+<a:theme xmlns:thm15="http://schemas.microsoft.com/office/thememl/2012/main" xmlns:a="http://schemas.openxmlformats.org/drawingml/2006/main" name="Raven">
   <a:themeElements>
     <a:clrScheme name="自定义 272">
       <a:dk1>
@@ -44614,7 +44600,7 @@
         <a:srgbClr val="979797"/>
       </a:folHlink>
     </a:clrScheme>
-    <a:fontScheme name="iSlide">
+    <a:fontScheme name="Raven">
       <a:majorFont>
         <a:latin typeface="Arial"/>
         <a:ea typeface="微软雅黑"/>
@@ -44626,7 +44612,7 @@
         <a:cs typeface=""/>
       </a:minorFont>
     </a:fontScheme>
-    <a:fmtScheme name="iSlide">
+    <a:fmtScheme name="Raven">
       <a:fillStyleLst>
         <a:solidFill>
           <a:schemeClr val="phClr"/>
@@ -44768,7 +44754,7 @@
   <a:extraClrSchemeLst/>
   <a:extLst>
     <a:ext uri="{05A4C25C-085E-4340-85A3-A5531E510DB2}">
-      <thm15:themeFamily xmlns:thm15="http://schemas.microsoft.com/office/thememl/2012/main" name="iSlide" id="{62F939B6-93AF-4DB8-9C6B-D6C7DFDC589F}" vid="{4A3C46E8-61CC-4603-A589-7422A47A8E4A}"/>
+      <thm15:themeFamily xmlns:thm15="http://schemas.microsoft.com/office/thememl/2012/main" name="Raven" id="{62F939B6-93AF-4DB8-9C6B-D6C7DFDC589F}" vid="{4A3C46E8-61CC-4603-A589-7422A47A8E4A}"/>
     </a:ext>
   </a:extLst>
 </a:theme>
